--- a/docs/präsentation/folien_paket_b.pptx
+++ b/docs/präsentation/folien_paket_b.pptx
@@ -6592,7 +6592,7 @@
               </a:defRPr>
             </a:pPr>
             <a:r>
-              <a:t>• Status jeder Zeit (REAL, PROGNOSE, GESCHAETZT) wird mitgeführt</a:t>
+              <a:t>• Status jeder Zeit (REAL, PROGNOSE, GESCHAETZT, UNBEKANNT, leer) wird mitgeführt</a:t>
             </a:r>
           </a:p>
         </p:txBody>
@@ -8509,7 +8509,7 @@
         </p:nvSpPr>
         <p:spPr>
           <a:xfrm>
-            <a:off x="2697480" y="3154680"/>
+            <a:off x="1737360" y="3154680"/>
             <a:ext cx="2743200" cy="365760"/>
           </a:xfrm>
           <a:prstGeom prst="rect">
@@ -8535,7 +8535,7 @@
               </a:defRPr>
             </a:pPr>
             <a:r>
-              <a:t>bpuic</a:t>
+              <a:t>bpuic_haltestelle = bpuic</a:t>
             </a:r>
           </a:p>
         </p:txBody>
@@ -10398,7 +10398,7 @@
               </a:defRPr>
             </a:pPr>
             <a:r>
-              <a:t>Ankunft gemessen: Bahn 89,7 %, Bus 65,9 %, der Rest sind Prognosen oder Schätzungen. Der Status ist pro Zeit gespeichert, Paket C nimmt nur gemessene Werte.</a:t>
+              <a:t>Ankunft gemessen: Bahn 89,7 %, Bus 65,9 %. Der Rest sind Prognosen, Schätzungen oder Halte mit leerem oder unbekanntem Status (z. B. ohne Ankunft am Startort). Der Status ist pro Zeit gespeichert, Paket C nimmt nur gemessene Werte.</a:t>
             </a:r>
           </a:p>
         </p:txBody>

--- a/docs/präsentation/folien_paket_b.pptx
+++ b/docs/präsentation/folien_paket_b.pptx
@@ -11,8 +11,6 @@
     <p:sldId id="259" r:id="rId11"/>
     <p:sldId id="260" r:id="rId12"/>
     <p:sldId id="261" r:id="rId13"/>
-    <p:sldId id="262" r:id="rId14"/>
-    <p:sldId id="263" r:id="rId15"/>
   </p:sldIdLst>
   <p:sldSz cx="12191695" cy="6858000" type="screen4x3"/>
   <p:notesSz cx="6858000" cy="9144000"/>
@@ -860,146 +858,6 @@
           <a:p>
             <a:r>
               <a:t>Ca. 45 Sekunden. Die ersten zwei Zeilen haben wir gemessen, die letzte ist hochgerechnet. Für mehr Kantone braucht es nur eine längere Haltestellenliste, Code und Schema bleiben gleich. Bei der ganzen Schweiz könnte man die Daten als Parquet liegen lassen und DuckDB direkt darauf abfragen. Die echte Grenze ist der Mehrbenutzerbetrieb, dafür wäre PostgreSQL die nächste Stufe. Die gefilterten Daten liegen als Parquet (305 MB) auf OneDrive, Link im README. Damit übergebe ich an Enis.</a:t>
-            </a:r>
-          </a:p>
-        </p:txBody>
-      </p:sp>
-      <p:sp>
-        <p:nvSpPr>
-          <p:cNvPr id="4" name="Slide Number Placeholder 3"/>
-          <p:cNvSpPr>
-            <a:spLocks noGrp="1"/>
-          </p:cNvSpPr>
-          <p:nvPr>
-            <p:ph type="sldNum" idx="5" sz="quarter"/>
-          </p:nvPr>
-        </p:nvSpPr>
-        <p:spPr/>
-      </p:sp>
-    </p:spTree>
-  </p:cSld>
-  <p:clrMapOvr>
-    <a:masterClrMapping/>
-  </p:clrMapOvr>
-</p:notes>
-</file>
-
-<file path=ppt/notesSlides/notesSlide7.xml><?xml version="1.0" encoding="utf-8"?>
-<p:notes xmlns:a="http://schemas.openxmlformats.org/drawingml/2006/main" xmlns:p="http://schemas.openxmlformats.org/presentationml/2006/main" xmlns:r="http://schemas.openxmlformats.org/officeDocument/2006/relationships">
-  <p:cSld>
-    <p:spTree>
-      <p:nvGrpSpPr>
-        <p:cNvPr id="1" name=""/>
-        <p:cNvGrpSpPr/>
-        <p:nvPr/>
-      </p:nvGrpSpPr>
-      <p:grpSpPr>
-        <a:xfrm>
-          <a:off x="0" y="0"/>
-          <a:ext cx="0" cy="0"/>
-          <a:chOff x="0" y="0"/>
-          <a:chExt cx="0" cy="0"/>
-        </a:xfrm>
-      </p:grpSpPr>
-      <p:sp>
-        <p:nvSpPr>
-          <p:cNvPr id="2" name="Slide Image Placeholder 1"/>
-          <p:cNvSpPr>
-            <a:spLocks noGrp="1"/>
-          </p:cNvSpPr>
-          <p:nvPr>
-            <p:ph type="sldImg" idx="2"/>
-          </p:nvPr>
-        </p:nvSpPr>
-        <p:spPr/>
-      </p:sp>
-      <p:sp>
-        <p:nvSpPr>
-          <p:cNvPr id="3" name="Notes Placeholder 2"/>
-          <p:cNvSpPr>
-            <a:spLocks noGrp="1"/>
-          </p:cNvSpPr>
-          <p:nvPr>
-            <p:ph type="body" idx="3" sz="quarter"/>
-          </p:nvPr>
-        </p:nvSpPr>
-        <p:spPr/>
-        <p:txBody>
-          <a:bodyPr/>
-          <a:lstStyle/>
-          <a:p>
-            <a:r>
-              <a:t>Anhang, nicht Teil der fünf Minuten. Nur zeigen, falls gefragt.</a:t>
-            </a:r>
-          </a:p>
-        </p:txBody>
-      </p:sp>
-      <p:sp>
-        <p:nvSpPr>
-          <p:cNvPr id="4" name="Slide Number Placeholder 3"/>
-          <p:cNvSpPr>
-            <a:spLocks noGrp="1"/>
-          </p:cNvSpPr>
-          <p:nvPr>
-            <p:ph type="sldNum" idx="5" sz="quarter"/>
-          </p:nvPr>
-        </p:nvSpPr>
-        <p:spPr/>
-      </p:sp>
-    </p:spTree>
-  </p:cSld>
-  <p:clrMapOvr>
-    <a:masterClrMapping/>
-  </p:clrMapOvr>
-</p:notes>
-</file>
-
-<file path=ppt/notesSlides/notesSlide8.xml><?xml version="1.0" encoding="utf-8"?>
-<p:notes xmlns:a="http://schemas.openxmlformats.org/drawingml/2006/main" xmlns:p="http://schemas.openxmlformats.org/presentationml/2006/main" xmlns:r="http://schemas.openxmlformats.org/officeDocument/2006/relationships">
-  <p:cSld>
-    <p:spTree>
-      <p:nvGrpSpPr>
-        <p:cNvPr id="1" name=""/>
-        <p:cNvGrpSpPr/>
-        <p:nvPr/>
-      </p:nvGrpSpPr>
-      <p:grpSpPr>
-        <a:xfrm>
-          <a:off x="0" y="0"/>
-          <a:ext cx="0" cy="0"/>
-          <a:chOff x="0" y="0"/>
-          <a:chExt cx="0" cy="0"/>
-        </a:xfrm>
-      </p:grpSpPr>
-      <p:sp>
-        <p:nvSpPr>
-          <p:cNvPr id="2" name="Slide Image Placeholder 1"/>
-          <p:cNvSpPr>
-            <a:spLocks noGrp="1"/>
-          </p:cNvSpPr>
-          <p:nvPr>
-            <p:ph type="sldImg" idx="2"/>
-          </p:nvPr>
-        </p:nvSpPr>
-        <p:spPr/>
-      </p:sp>
-      <p:sp>
-        <p:nvSpPr>
-          <p:cNvPr id="3" name="Notes Placeholder 2"/>
-          <p:cNvSpPr>
-            <a:spLocks noGrp="1"/>
-          </p:cNvSpPr>
-          <p:nvPr>
-            <p:ph type="body" idx="3" sz="quarter"/>
-          </p:nvPr>
-        </p:nvSpPr>
-        <p:spPr/>
-        <p:txBody>
-          <a:bodyPr/>
-          <a:lstStyle/>
-          <a:p>
-            <a:r>
-              <a:t>Anhang, nicht Teil der fünf Minuten. Nur zeigen, falls gefragt.</a:t>
             </a:r>
           </a:p>
         </p:txBody>
@@ -4129,7 +3987,7 @@
               </a:defRPr>
             </a:pPr>
             <a:r>
-              <a:t>Gruppe 4 · Aladin · Paket B · 27.10.2026 | Quellen: SBB/SKI (2026), swisstopo (2026), DuckDB Foundation (2026)</a:t>
+              <a:t>Gruppe 4 · Aladin · Paket B | Quellen: SBB/SKI (2026), swisstopo (2026), DuckDB Foundation (2026)</a:t>
             </a:r>
           </a:p>
         </p:txBody>
@@ -4730,7 +4588,7 @@
               </a:defRPr>
             </a:pPr>
             <a:r>
-              <a:t>Gruppe 4 · Aladin · Paket B · 27.10.2026 | Quellen: SBB/SKI (2026), swisstopo (2026), DuckDB Foundation (2026)</a:t>
+              <a:t>Gruppe 4 · Aladin · Paket B | Quellen: SBB/SKI (2026), swisstopo (2026), DuckDB Foundation (2026)</a:t>
             </a:r>
           </a:p>
         </p:txBody>
@@ -5961,7 +5819,7 @@
               </a:defRPr>
             </a:pPr>
             <a:r>
-              <a:t>Gruppe 4 · Aladin · Paket B · 27.10.2026 | Quellen: SBB/SKI (2026), swisstopo (2026), DuckDB Foundation (2026)</a:t>
+              <a:t>Gruppe 4 · Aladin · Paket B | Quellen: SBB/SKI (2026), swisstopo (2026), DuckDB Foundation (2026)</a:t>
             </a:r>
           </a:p>
         </p:txBody>
@@ -6739,7 +6597,7 @@
               </a:defRPr>
             </a:pPr>
             <a:r>
-              <a:t>Gruppe 4 · Aladin · Paket B · 27.10.2026 | Quellen: SBB/SKI (2026), swisstopo (2026), DuckDB Foundation (2026)</a:t>
+              <a:t>Gruppe 4 · Aladin · Paket B | Quellen: SBB/SKI (2026), swisstopo (2026), DuckDB Foundation (2026)</a:t>
             </a:r>
           </a:p>
         </p:txBody>
@@ -7847,7 +7705,7 @@
               </a:defRPr>
             </a:pPr>
             <a:r>
-              <a:t>Gruppe 4 · Aladin · Paket B · 27.10.2026 | Quellen: SBB/SKI (2026), swisstopo (2026), DuckDB Foundation (2026)</a:t>
+              <a:t>Gruppe 4 · Aladin · Paket B | Quellen: SBB/SKI (2026), swisstopo (2026), DuckDB Foundation (2026)</a:t>
             </a:r>
           </a:p>
         </p:txBody>
@@ -9087,7 +8945,7 @@
               </a:defRPr>
             </a:pPr>
             <a:r>
-              <a:t>Gruppe 4 · Aladin · Paket B · 27.10.2026 | Quellen: SBB/SKI (2026), swisstopo (2026), DuckDB Foundation (2026)</a:t>
+              <a:t>Gruppe 4 · Aladin · Paket B | Quellen: SBB/SKI (2026), swisstopo (2026), DuckDB Foundation (2026)</a:t>
             </a:r>
           </a:p>
         </p:txBody>
@@ -9715,846 +9573,6 @@
             </a:pPr>
             <a:r>
               <a:t>• Grenze: DuckDB erlaubt nur einen schreibenden Prozess; für Teil 2 ist PostgreSQL die nächste Stufe.</a:t>
-            </a:r>
-          </a:p>
-        </p:txBody>
-      </p:sp>
-    </p:spTree>
-  </p:cSld>
-  <p:clrMapOvr>
-    <a:masterClrMapping/>
-  </p:clrMapOvr>
-</p:sld>
-</file>
-
-<file path=ppt/slides/slide7.xml><?xml version="1.0" encoding="utf-8"?>
-<p:sld xmlns:a="http://schemas.openxmlformats.org/drawingml/2006/main" xmlns:p="http://schemas.openxmlformats.org/presentationml/2006/main" xmlns:r="http://schemas.openxmlformats.org/officeDocument/2006/relationships">
-  <p:cSld>
-    <p:bg>
-      <p:bgPr>
-        <a:solidFill>
-          <a:srgbClr val="FFFFFF"/>
-        </a:solidFill>
-        <a:effectLst/>
-      </p:bgPr>
-    </p:bg>
-    <p:spTree>
-      <p:nvGrpSpPr>
-        <p:cNvPr id="1" name=""/>
-        <p:cNvGrpSpPr/>
-        <p:nvPr/>
-      </p:nvGrpSpPr>
-      <p:grpSpPr/>
-      <p:sp>
-        <p:nvSpPr>
-          <p:cNvPr id="2" name="Rectangle 1"/>
-          <p:cNvSpPr/>
-          <p:nvPr/>
-        </p:nvSpPr>
-        <p:spPr>
-          <a:xfrm>
-            <a:off x="0" y="0"/>
-            <a:ext cx="12191695" cy="109728"/>
-          </a:xfrm>
-          <a:prstGeom prst="rect">
-            <a:avLst/>
-          </a:prstGeom>
-          <a:solidFill>
-            <a:srgbClr val="167D8D"/>
-          </a:solidFill>
-          <a:ln>
-            <a:noFill/>
-          </a:ln>
-        </p:spPr>
-        <p:style>
-          <a:lnRef idx="1">
-            <a:schemeClr val="accent1"/>
-          </a:lnRef>
-          <a:fillRef idx="3">
-            <a:schemeClr val="accent1"/>
-          </a:fillRef>
-          <a:effectRef idx="2">
-            <a:schemeClr val="accent1"/>
-          </a:effectRef>
-          <a:fontRef idx="minor">
-            <a:schemeClr val="lt1"/>
-          </a:fontRef>
-        </p:style>
-        <p:txBody>
-          <a:bodyPr rtlCol="0" anchor="ctr"/>
-          <a:lstStyle/>
-          <a:p>
-            <a:pPr algn="ctr"/>
-          </a:p>
-        </p:txBody>
-      </p:sp>
-      <p:sp>
-        <p:nvSpPr>
-          <p:cNvPr id="3" name="TextBox 2"/>
-          <p:cNvSpPr txBox="1"/>
-          <p:nvPr/>
-        </p:nvSpPr>
-        <p:spPr>
-          <a:xfrm>
-            <a:off x="457200" y="320040"/>
-            <a:ext cx="11247120" cy="548640"/>
-          </a:xfrm>
-          <a:prstGeom prst="rect">
-            <a:avLst/>
-          </a:prstGeom>
-          <a:noFill/>
-        </p:spPr>
-        <p:txBody>
-          <a:bodyPr wrap="square">
-            <a:spAutoFit/>
-          </a:bodyPr>
-          <a:lstStyle/>
-          <a:p>
-            <a:pPr>
-              <a:spcAft>
-                <a:spcPts val="1200"/>
-              </a:spcAft>
-              <a:defRPr sz="3000" b="1">
-                <a:solidFill>
-                  <a:srgbClr val="17364A"/>
-                </a:solidFill>
-                <a:latin typeface="Aptos"/>
-              </a:defRPr>
-            </a:pPr>
-            <a:r>
-              <a:t>Paket B: mögliche Fragen 1/2 (Anhang)</a:t>
-            </a:r>
-          </a:p>
-        </p:txBody>
-      </p:sp>
-      <p:sp>
-        <p:nvSpPr>
-          <p:cNvPr id="4" name="TextBox 3"/>
-          <p:cNvSpPr txBox="1"/>
-          <p:nvPr/>
-        </p:nvSpPr>
-        <p:spPr>
-          <a:xfrm>
-            <a:off x="457200" y="6473952"/>
-            <a:ext cx="10881360" cy="274320"/>
-          </a:xfrm>
-          <a:prstGeom prst="rect">
-            <a:avLst/>
-          </a:prstGeom>
-          <a:noFill/>
-        </p:spPr>
-        <p:txBody>
-          <a:bodyPr wrap="square">
-            <a:spAutoFit/>
-          </a:bodyPr>
-          <a:lstStyle/>
-          <a:p>
-            <a:pPr>
-              <a:spcAft>
-                <a:spcPts val="1200"/>
-              </a:spcAft>
-              <a:defRPr sz="1000" b="0">
-                <a:solidFill>
-                  <a:srgbClr val="53616B"/>
-                </a:solidFill>
-                <a:latin typeface="Aptos"/>
-              </a:defRPr>
-            </a:pPr>
-            <a:r>
-              <a:t>Gruppe 4 · Aladin · Paket B · 27.10.2026 | Quellen: SBB/SKI (2026), swisstopo (2026), DuckDB Foundation (2026)</a:t>
-            </a:r>
-          </a:p>
-        </p:txBody>
-      </p:sp>
-      <p:sp>
-        <p:nvSpPr>
-          <p:cNvPr id="5" name="TextBox 4"/>
-          <p:cNvSpPr txBox="1"/>
-          <p:nvPr/>
-        </p:nvSpPr>
-        <p:spPr>
-          <a:xfrm>
-            <a:off x="11338560" y="6455664"/>
-            <a:ext cx="457200" cy="274320"/>
-          </a:xfrm>
-          <a:prstGeom prst="rect">
-            <a:avLst/>
-          </a:prstGeom>
-          <a:noFill/>
-        </p:spPr>
-        <p:txBody>
-          <a:bodyPr wrap="square">
-            <a:spAutoFit/>
-          </a:bodyPr>
-          <a:lstStyle/>
-          <a:p>
-            <a:pPr>
-              <a:spcAft>
-                <a:spcPts val="1200"/>
-              </a:spcAft>
-              <a:defRPr sz="1100" b="0">
-                <a:solidFill>
-                  <a:srgbClr val="53616B"/>
-                </a:solidFill>
-                <a:latin typeface="Aptos"/>
-              </a:defRPr>
-            </a:pPr>
-            <a:r>
-              <a:t>7</a:t>
-            </a:r>
-          </a:p>
-        </p:txBody>
-      </p:sp>
-      <p:sp>
-        <p:nvSpPr>
-          <p:cNvPr id="6" name="TextBox 5"/>
-          <p:cNvSpPr txBox="1"/>
-          <p:nvPr/>
-        </p:nvSpPr>
-        <p:spPr>
-          <a:xfrm>
-            <a:off x="502920" y="1234440"/>
-            <a:ext cx="11155680" cy="457200"/>
-          </a:xfrm>
-          <a:prstGeom prst="rect">
-            <a:avLst/>
-          </a:prstGeom>
-          <a:noFill/>
-        </p:spPr>
-        <p:txBody>
-          <a:bodyPr wrap="square">
-            <a:spAutoFit/>
-          </a:bodyPr>
-          <a:lstStyle/>
-          <a:p>
-            <a:pPr>
-              <a:spcAft>
-                <a:spcPts val="1200"/>
-              </a:spcAft>
-              <a:defRPr sz="2000" b="1">
-                <a:solidFill>
-                  <a:srgbClr val="167D8D"/>
-                </a:solidFill>
-                <a:latin typeface="Aptos"/>
-              </a:defRPr>
-            </a:pPr>
-            <a:r>
-              <a:t>Warum nicht PostgreSQL?</a:t>
-            </a:r>
-          </a:p>
-        </p:txBody>
-      </p:sp>
-      <p:sp>
-        <p:nvSpPr>
-          <p:cNvPr id="7" name="TextBox 6"/>
-          <p:cNvSpPr txBox="1"/>
-          <p:nvPr/>
-        </p:nvSpPr>
-        <p:spPr>
-          <a:xfrm>
-            <a:off x="502920" y="1737360"/>
-            <a:ext cx="11155680" cy="1097280"/>
-          </a:xfrm>
-          <a:prstGeom prst="rect">
-            <a:avLst/>
-          </a:prstGeom>
-          <a:noFill/>
-        </p:spPr>
-        <p:txBody>
-          <a:bodyPr wrap="square">
-            <a:spAutoFit/>
-          </a:bodyPr>
-          <a:lstStyle/>
-          <a:p>
-            <a:pPr>
-              <a:spcAft>
-                <a:spcPts val="1200"/>
-              </a:spcAft>
-              <a:defRPr sz="1700" b="0">
-                <a:solidFill>
-                  <a:srgbClr val="17364A"/>
-                </a:solidFill>
-                <a:latin typeface="Aptos"/>
-              </a:defRPr>
-            </a:pPr>
-            <a:r>
-              <a:t>Für Teil 1 brauchen wir Analyse, keinen Mehrbenutzerbetrieb. DuckDB ist schneller aufgesetzt und spaltenorientiert; das Schema ist Standard-SQL, ein Wechsel ist einfach.</a:t>
-            </a:r>
-          </a:p>
-        </p:txBody>
-      </p:sp>
-      <p:sp>
-        <p:nvSpPr>
-          <p:cNvPr id="8" name="TextBox 7"/>
-          <p:cNvSpPr txBox="1"/>
-          <p:nvPr/>
-        </p:nvSpPr>
-        <p:spPr>
-          <a:xfrm>
-            <a:off x="502920" y="2926080"/>
-            <a:ext cx="11155680" cy="457200"/>
-          </a:xfrm>
-          <a:prstGeom prst="rect">
-            <a:avLst/>
-          </a:prstGeom>
-          <a:noFill/>
-        </p:spPr>
-        <p:txBody>
-          <a:bodyPr wrap="square">
-            <a:spAutoFit/>
-          </a:bodyPr>
-          <a:lstStyle/>
-          <a:p>
-            <a:pPr>
-              <a:spcAft>
-                <a:spcPts val="1200"/>
-              </a:spcAft>
-              <a:defRPr sz="2000" b="1">
-                <a:solidFill>
-                  <a:srgbClr val="167D8D"/>
-                </a:solidFill>
-                <a:latin typeface="Aptos"/>
-              </a:defRPr>
-            </a:pPr>
-            <a:r>
-              <a:t>Was heisst idempotent bei euch?</a:t>
-            </a:r>
-          </a:p>
-        </p:txBody>
-      </p:sp>
-      <p:sp>
-        <p:nvSpPr>
-          <p:cNvPr id="9" name="TextBox 8"/>
-          <p:cNvSpPr txBox="1"/>
-          <p:nvPr/>
-        </p:nvSpPr>
-        <p:spPr>
-          <a:xfrm>
-            <a:off x="502920" y="3429000"/>
-            <a:ext cx="11155680" cy="1097280"/>
-          </a:xfrm>
-          <a:prstGeom prst="rect">
-            <a:avLst/>
-          </a:prstGeom>
-          <a:noFill/>
-        </p:spPr>
-        <p:txBody>
-          <a:bodyPr wrap="square">
-            <a:spAutoFit/>
-          </a:bodyPr>
-          <a:lstStyle/>
-          <a:p>
-            <a:pPr>
-              <a:spcAft>
-                <a:spcPts val="1200"/>
-              </a:spcAft>
-              <a:defRPr sz="1700" b="0">
-                <a:solidFill>
-                  <a:srgbClr val="17364A"/>
-                </a:solidFill>
-                <a:latin typeface="Aptos"/>
-              </a:defRPr>
-            </a:pPr>
-            <a:r>
-              <a:t>Jeder Tag wird in einer Transaktion gelöscht und neu eingefügt. Ein zweiter Lauf überspringt fertige Tage. Geprüft: zweiter Lauf, 90 Tage übersprungen.</a:t>
-            </a:r>
-          </a:p>
-        </p:txBody>
-      </p:sp>
-      <p:sp>
-        <p:nvSpPr>
-          <p:cNvPr id="10" name="TextBox 9"/>
-          <p:cNvSpPr txBox="1"/>
-          <p:nvPr/>
-        </p:nvSpPr>
-        <p:spPr>
-          <a:xfrm>
-            <a:off x="502920" y="4617720"/>
-            <a:ext cx="11155680" cy="457200"/>
-          </a:xfrm>
-          <a:prstGeom prst="rect">
-            <a:avLst/>
-          </a:prstGeom>
-          <a:noFill/>
-        </p:spPr>
-        <p:txBody>
-          <a:bodyPr wrap="square">
-            <a:spAutoFit/>
-          </a:bodyPr>
-          <a:lstStyle/>
-          <a:p>
-            <a:pPr>
-              <a:spcAft>
-                <a:spcPts val="1200"/>
-              </a:spcAft>
-              <a:defRPr sz="2000" b="1">
-                <a:solidFill>
-                  <a:srgbClr val="167D8D"/>
-                </a:solidFill>
-                <a:latin typeface="Aptos"/>
-              </a:defRPr>
-            </a:pPr>
-            <a:r>
-              <a:t>Wie geht ihr mit der Sommerzeit um?</a:t>
-            </a:r>
-          </a:p>
-        </p:txBody>
-      </p:sp>
-      <p:sp>
-        <p:nvSpPr>
-          <p:cNvPr id="11" name="TextBox 10"/>
-          <p:cNvSpPr txBox="1"/>
-          <p:nvPr/>
-        </p:nvSpPr>
-        <p:spPr>
-          <a:xfrm>
-            <a:off x="502920" y="5120640"/>
-            <a:ext cx="11155680" cy="1097280"/>
-          </a:xfrm>
-          <a:prstGeom prst="rect">
-            <a:avLst/>
-          </a:prstGeom>
-          <a:noFill/>
-        </p:spPr>
-        <p:txBody>
-          <a:bodyPr wrap="square">
-            <a:spAutoFit/>
-          </a:bodyPr>
-          <a:lstStyle/>
-          <a:p>
-            <a:pPr>
-              <a:spcAft>
-                <a:spcPts val="1200"/>
-              </a:spcAft>
-              <a:defRPr sz="1700" b="0">
-                <a:solidFill>
-                  <a:srgbClr val="17364A"/>
-                </a:solidFill>
-                <a:latin typeface="Aptos"/>
-              </a:defRPr>
-            </a:pPr>
-            <a:r>
-              <a:t>Rohzeiten sind Lokalzeit. Wir wandeln sie mit Europe/Zurich in TIMESTAMPTZ um, so stimmen Dauern über die Umstellung am 29.3.</a:t>
-            </a:r>
-          </a:p>
-        </p:txBody>
-      </p:sp>
-    </p:spTree>
-  </p:cSld>
-  <p:clrMapOvr>
-    <a:masterClrMapping/>
-  </p:clrMapOvr>
-</p:sld>
-</file>
-
-<file path=ppt/slides/slide8.xml><?xml version="1.0" encoding="utf-8"?>
-<p:sld xmlns:a="http://schemas.openxmlformats.org/drawingml/2006/main" xmlns:p="http://schemas.openxmlformats.org/presentationml/2006/main" xmlns:r="http://schemas.openxmlformats.org/officeDocument/2006/relationships">
-  <p:cSld>
-    <p:bg>
-      <p:bgPr>
-        <a:solidFill>
-          <a:srgbClr val="FFFFFF"/>
-        </a:solidFill>
-        <a:effectLst/>
-      </p:bgPr>
-    </p:bg>
-    <p:spTree>
-      <p:nvGrpSpPr>
-        <p:cNvPr id="1" name=""/>
-        <p:cNvGrpSpPr/>
-        <p:nvPr/>
-      </p:nvGrpSpPr>
-      <p:grpSpPr/>
-      <p:sp>
-        <p:nvSpPr>
-          <p:cNvPr id="2" name="Rectangle 1"/>
-          <p:cNvSpPr/>
-          <p:nvPr/>
-        </p:nvSpPr>
-        <p:spPr>
-          <a:xfrm>
-            <a:off x="0" y="0"/>
-            <a:ext cx="12191695" cy="109728"/>
-          </a:xfrm>
-          <a:prstGeom prst="rect">
-            <a:avLst/>
-          </a:prstGeom>
-          <a:solidFill>
-            <a:srgbClr val="167D8D"/>
-          </a:solidFill>
-          <a:ln>
-            <a:noFill/>
-          </a:ln>
-        </p:spPr>
-        <p:style>
-          <a:lnRef idx="1">
-            <a:schemeClr val="accent1"/>
-          </a:lnRef>
-          <a:fillRef idx="3">
-            <a:schemeClr val="accent1"/>
-          </a:fillRef>
-          <a:effectRef idx="2">
-            <a:schemeClr val="accent1"/>
-          </a:effectRef>
-          <a:fontRef idx="minor">
-            <a:schemeClr val="lt1"/>
-          </a:fontRef>
-        </p:style>
-        <p:txBody>
-          <a:bodyPr rtlCol="0" anchor="ctr"/>
-          <a:lstStyle/>
-          <a:p>
-            <a:pPr algn="ctr"/>
-          </a:p>
-        </p:txBody>
-      </p:sp>
-      <p:sp>
-        <p:nvSpPr>
-          <p:cNvPr id="3" name="TextBox 2"/>
-          <p:cNvSpPr txBox="1"/>
-          <p:nvPr/>
-        </p:nvSpPr>
-        <p:spPr>
-          <a:xfrm>
-            <a:off x="457200" y="320040"/>
-            <a:ext cx="11247120" cy="548640"/>
-          </a:xfrm>
-          <a:prstGeom prst="rect">
-            <a:avLst/>
-          </a:prstGeom>
-          <a:noFill/>
-        </p:spPr>
-        <p:txBody>
-          <a:bodyPr wrap="square">
-            <a:spAutoFit/>
-          </a:bodyPr>
-          <a:lstStyle/>
-          <a:p>
-            <a:pPr>
-              <a:spcAft>
-                <a:spcPts val="1200"/>
-              </a:spcAft>
-              <a:defRPr sz="3000" b="1">
-                <a:solidFill>
-                  <a:srgbClr val="17364A"/>
-                </a:solidFill>
-                <a:latin typeface="Aptos"/>
-              </a:defRPr>
-            </a:pPr>
-            <a:r>
-              <a:t>Paket B: mögliche Fragen 2/2 (Anhang)</a:t>
-            </a:r>
-          </a:p>
-        </p:txBody>
-      </p:sp>
-      <p:sp>
-        <p:nvSpPr>
-          <p:cNvPr id="4" name="TextBox 3"/>
-          <p:cNvSpPr txBox="1"/>
-          <p:nvPr/>
-        </p:nvSpPr>
-        <p:spPr>
-          <a:xfrm>
-            <a:off x="457200" y="6473952"/>
-            <a:ext cx="10881360" cy="274320"/>
-          </a:xfrm>
-          <a:prstGeom prst="rect">
-            <a:avLst/>
-          </a:prstGeom>
-          <a:noFill/>
-        </p:spPr>
-        <p:txBody>
-          <a:bodyPr wrap="square">
-            <a:spAutoFit/>
-          </a:bodyPr>
-          <a:lstStyle/>
-          <a:p>
-            <a:pPr>
-              <a:spcAft>
-                <a:spcPts val="1200"/>
-              </a:spcAft>
-              <a:defRPr sz="1000" b="0">
-                <a:solidFill>
-                  <a:srgbClr val="53616B"/>
-                </a:solidFill>
-                <a:latin typeface="Aptos"/>
-              </a:defRPr>
-            </a:pPr>
-            <a:r>
-              <a:t>Gruppe 4 · Aladin · Paket B · 27.10.2026 | Quellen: SBB/SKI (2026), swisstopo (2026), DuckDB Foundation (2026)</a:t>
-            </a:r>
-          </a:p>
-        </p:txBody>
-      </p:sp>
-      <p:sp>
-        <p:nvSpPr>
-          <p:cNvPr id="5" name="TextBox 4"/>
-          <p:cNvSpPr txBox="1"/>
-          <p:nvPr/>
-        </p:nvSpPr>
-        <p:spPr>
-          <a:xfrm>
-            <a:off x="11338560" y="6455664"/>
-            <a:ext cx="457200" cy="274320"/>
-          </a:xfrm>
-          <a:prstGeom prst="rect">
-            <a:avLst/>
-          </a:prstGeom>
-          <a:noFill/>
-        </p:spPr>
-        <p:txBody>
-          <a:bodyPr wrap="square">
-            <a:spAutoFit/>
-          </a:bodyPr>
-          <a:lstStyle/>
-          <a:p>
-            <a:pPr>
-              <a:spcAft>
-                <a:spcPts val="1200"/>
-              </a:spcAft>
-              <a:defRPr sz="1100" b="0">
-                <a:solidFill>
-                  <a:srgbClr val="53616B"/>
-                </a:solidFill>
-                <a:latin typeface="Aptos"/>
-              </a:defRPr>
-            </a:pPr>
-            <a:r>
-              <a:t>8</a:t>
-            </a:r>
-          </a:p>
-        </p:txBody>
-      </p:sp>
-      <p:sp>
-        <p:nvSpPr>
-          <p:cNvPr id="6" name="TextBox 5"/>
-          <p:cNvSpPr txBox="1"/>
-          <p:nvPr/>
-        </p:nvSpPr>
-        <p:spPr>
-          <a:xfrm>
-            <a:off x="502920" y="1234440"/>
-            <a:ext cx="11155680" cy="457200"/>
-          </a:xfrm>
-          <a:prstGeom prst="rect">
-            <a:avLst/>
-          </a:prstGeom>
-          <a:noFill/>
-        </p:spPr>
-        <p:txBody>
-          <a:bodyPr wrap="square">
-            <a:spAutoFit/>
-          </a:bodyPr>
-          <a:lstStyle/>
-          <a:p>
-            <a:pPr>
-              <a:spcAft>
-                <a:spcPts val="1200"/>
-              </a:spcAft>
-              <a:defRPr sz="2000" b="1">
-                <a:solidFill>
-                  <a:srgbClr val="167D8D"/>
-                </a:solidFill>
-                <a:latin typeface="Aptos"/>
-              </a:defRPr>
-            </a:pPr>
-            <a:r>
-              <a:t>Wie zuverlässig sind die Ist-Zeiten?</a:t>
-            </a:r>
-          </a:p>
-        </p:txBody>
-      </p:sp>
-      <p:sp>
-        <p:nvSpPr>
-          <p:cNvPr id="7" name="TextBox 6"/>
-          <p:cNvSpPr txBox="1"/>
-          <p:nvPr/>
-        </p:nvSpPr>
-        <p:spPr>
-          <a:xfrm>
-            <a:off x="502920" y="1737360"/>
-            <a:ext cx="11155680" cy="1097280"/>
-          </a:xfrm>
-          <a:prstGeom prst="rect">
-            <a:avLst/>
-          </a:prstGeom>
-          <a:noFill/>
-        </p:spPr>
-        <p:txBody>
-          <a:bodyPr wrap="square">
-            <a:spAutoFit/>
-          </a:bodyPr>
-          <a:lstStyle/>
-          <a:p>
-            <a:pPr>
-              <a:spcAft>
-                <a:spcPts val="1200"/>
-              </a:spcAft>
-              <a:defRPr sz="1700" b="0">
-                <a:solidFill>
-                  <a:srgbClr val="17364A"/>
-                </a:solidFill>
-                <a:latin typeface="Aptos"/>
-              </a:defRPr>
-            </a:pPr>
-            <a:r>
-              <a:t>Ankunft gemessen: Bahn 89,7 %, Bus 65,9 %. Der Rest sind Prognosen, Schätzungen oder Halte mit leerem oder unbekanntem Status (z. B. ohne Ankunft am Startort). Der Status ist pro Zeit gespeichert, Paket C nimmt nur gemessene Werte.</a:t>
-            </a:r>
-          </a:p>
-        </p:txBody>
-      </p:sp>
-      <p:sp>
-        <p:nvSpPr>
-          <p:cNvPr id="8" name="TextBox 7"/>
-          <p:cNvSpPr txBox="1"/>
-          <p:nvPr/>
-        </p:nvSpPr>
-        <p:spPr>
-          <a:xfrm>
-            <a:off x="502920" y="2926080"/>
-            <a:ext cx="11155680" cy="457200"/>
-          </a:xfrm>
-          <a:prstGeom prst="rect">
-            <a:avLst/>
-          </a:prstGeom>
-          <a:noFill/>
-        </p:spPr>
-        <p:txBody>
-          <a:bodyPr wrap="square">
-            <a:spAutoFit/>
-          </a:bodyPr>
-          <a:lstStyle/>
-          <a:p>
-            <a:pPr>
-              <a:spcAft>
-                <a:spcPts val="1200"/>
-              </a:spcAft>
-              <a:defRPr sz="2000" b="1">
-                <a:solidFill>
-                  <a:srgbClr val="167D8D"/>
-                </a:solidFill>
-                <a:latin typeface="Aptos"/>
-              </a:defRPr>
-            </a:pPr>
-            <a:r>
-              <a:t>Wie habt ihr die Haltestellen den Kantonen zugeordnet?</a:t>
-            </a:r>
-          </a:p>
-        </p:txBody>
-      </p:sp>
-      <p:sp>
-        <p:nvSpPr>
-          <p:cNvPr id="9" name="TextBox 8"/>
-          <p:cNvSpPr txBox="1"/>
-          <p:nvPr/>
-        </p:nvSpPr>
-        <p:spPr>
-          <a:xfrm>
-            <a:off x="502920" y="3429000"/>
-            <a:ext cx="11155680" cy="1097280"/>
-          </a:xfrm>
-          <a:prstGeom prst="rect">
-            <a:avLst/>
-          </a:prstGeom>
-          <a:noFill/>
-        </p:spPr>
-        <p:txBody>
-          <a:bodyPr wrap="square">
-            <a:spAutoFit/>
-          </a:bodyPr>
-          <a:lstStyle/>
-          <a:p>
-            <a:pPr>
-              <a:spcAft>
-                <a:spcPts val="1200"/>
-              </a:spcAft>
-              <a:defRPr sz="1700" b="0">
-                <a:solidFill>
-                  <a:srgbClr val="17364A"/>
-                </a:solidFill>
-                <a:latin typeface="Aptos"/>
-              </a:defRPr>
-            </a:pPr>
-            <a:r>
-              <a:t>Koordinaten aus dem GTFS-Fahrplan, dann Punkt-in-Polygon mit den Kantonsgrenzen von swisstopo. Ergebnis: 2587 Haltestellen.</a:t>
-            </a:r>
-          </a:p>
-        </p:txBody>
-      </p:sp>
-      <p:sp>
-        <p:nvSpPr>
-          <p:cNvPr id="10" name="TextBox 9"/>
-          <p:cNvSpPr txBox="1"/>
-          <p:nvPr/>
-        </p:nvSpPr>
-        <p:spPr>
-          <a:xfrm>
-            <a:off x="502920" y="4617720"/>
-            <a:ext cx="11155680" cy="457200"/>
-          </a:xfrm>
-          <a:prstGeom prst="rect">
-            <a:avLst/>
-          </a:prstGeom>
-          <a:noFill/>
-        </p:spPr>
-        <p:txBody>
-          <a:bodyPr wrap="square">
-            <a:spAutoFit/>
-          </a:bodyPr>
-          <a:lstStyle/>
-          <a:p>
-            <a:pPr>
-              <a:spcAft>
-                <a:spcPts val="1200"/>
-              </a:spcAft>
-              <a:defRPr sz="2000" b="1">
-                <a:solidFill>
-                  <a:srgbClr val="167D8D"/>
-                </a:solidFill>
-                <a:latin typeface="Aptos"/>
-              </a:defRPr>
-            </a:pPr>
-            <a:r>
-              <a:t>Warum liegen die Rohdaten nicht im Repo?</a:t>
-            </a:r>
-          </a:p>
-        </p:txBody>
-      </p:sp>
-      <p:sp>
-        <p:nvSpPr>
-          <p:cNvPr id="11" name="TextBox 10"/>
-          <p:cNvSpPr txBox="1"/>
-          <p:nvPr/>
-        </p:nvSpPr>
-        <p:spPr>
-          <a:xfrm>
-            <a:off x="502920" y="5120640"/>
-            <a:ext cx="11155680" cy="1097280"/>
-          </a:xfrm>
-          <a:prstGeom prst="rect">
-            <a:avLst/>
-          </a:prstGeom>
-          <a:noFill/>
-        </p:spPr>
-        <p:txBody>
-          <a:bodyPr wrap="square">
-            <a:spAutoFit/>
-          </a:bodyPr>
-          <a:lstStyle/>
-          <a:p>
-            <a:pPr>
-              <a:spcAft>
-                <a:spcPts val="1200"/>
-              </a:spcAft>
-              <a:defRPr sz="1700" b="0">
-                <a:solidFill>
-                  <a:srgbClr val="17364A"/>
-                </a:solidFill>
-                <a:latin typeface="Aptos"/>
-              </a:defRPr>
-            </a:pPr>
-            <a:r>
-              <a:t>Rund 50 GB ungefiltert. Im Repo liegt ein Beispieltag, das Skript lädt alles mit einem Befehl nach. Die gefilterten Daten liegen als Parquet auf OneDrive.</a:t>
             </a:r>
           </a:p>
         </p:txBody>
